--- a/deliverables/presentation-v2/zazerkalye-v2.pptx
+++ b/deliverables/presentation-v2/zazerkalye-v2.pptx
@@ -791,7 +791,7 @@
           <a:lstStyle/>
           <a:p>
             <a:r>
-              <a:t>Откроем событие: человек зашёл в опасную зону. В карточке кадр с рамкой и зоной, клип, камера, время начала и оповещения, задержка по этапам. Диспетчер ставит статус одной клавишей: подтверждено, ложное или передано мастеру. Каждое событие уходит в RabbitMQ JSON-конвертом: очередь долговечная, повторная доставка дублей не создаёт. MES, SCADA, ERP или бот в мессенджере просто подписываются на очередь.</a:t>
+              <a:t>Откроем событие: человек зашёл в опасную зону. В карточке кадр с рамкой и зоной, клип, камера, время начала и оповещения. Диспетчер ставит статус одной клавишей: подтверждено, ложное или передано мастеру, и отмечает виновника. Каждое событие уходит в RabbitMQ JSON-конвертом через exchange guard.edge.v1: очередь долговечная, повторная доставка дублей не создаёт. MES, SCADA, ERP или бот в мессенджере подписываются своей очередью; формат описан в docs/EDGE_PROTOCOL.md.</a:t>
             </a:r>
           </a:p>
         </p:txBody>
@@ -1141,7 +1141,7 @@
           <a:lstStyle/>
           <a:p>
             <a:r>
-              <a:t>Всё это работает на LinQ TPU: четыре камеры держат почти пять кадров в секунду каждая. От начала нарушения до оповещения 2,2 секунды по медиане, из них 1,7 — окно подтверждения правила. На процессоре того же контейнера кадров в четыре раза меньше, и сценарии СИЗ и падения просто не успевают подтвердиться. Цифры — замеры 24.10 на стенде: docs/EDGE.md, docs/BENCHMARKS.md.</a:t>
+              <a:t>Всё это работает на LinQ TPU: четыре камеры держат 4,8–4,9 кадра в секунду каждая. От начала нарушения до оповещения 2,2 секунды по медиане, из них 1,7 — окно подтверждения правила. На процессоре того же контейнера кадров в четыре раза меньше: 4,8 против 19,4 в секунду, и сценарии СИЗ и падения просто не успевают подтвердиться. Цифры — замеры 24.10 на стенде: docs/EDGE.md §6.1 и §6.3.</a:t>
             </a:r>
           </a:p>
         </p:txBody>
@@ -4165,7 +4165,7 @@
         </p:nvPicPr>
         <p:blipFill>
           <a:blip r:embed="rId2"/>
-          <a:srcRect l="11400" t="20500" r="52980" b="33500"/>
+          <a:srcRect l="11500" t="20500" r="53035" b="33700"/>
           <a:stretch>
             <a:fillRect/>
           </a:stretch>
@@ -4628,7 +4628,7 @@
         </p:nvSpPr>
         <p:spPr>
           <a:xfrm>
-            <a:off x="548640" y="438912"/>
+            <a:off x="548640" y="365760"/>
             <a:ext cx="7315200" cy="274320"/>
           </a:xfrm>
           <a:prstGeom prst="rect">
@@ -4667,7 +4667,7 @@
         </p:nvSpPr>
         <p:spPr>
           <a:xfrm>
-            <a:off x="9814255" y="438912"/>
+            <a:off x="9814255" y="365760"/>
             <a:ext cx="1828800" cy="274320"/>
           </a:xfrm>
           <a:prstGeom prst="rect">
@@ -4706,7 +4706,7 @@
         </p:nvSpPr>
         <p:spPr>
           <a:xfrm>
-            <a:off x="548640" y="749808"/>
+            <a:off x="548640" y="603504"/>
             <a:ext cx="11094415" cy="731520"/>
           </a:xfrm>
           <a:prstGeom prst="rect">
@@ -4724,7 +4724,7 @@
               </a:lnSpc>
             </a:pPr>
             <a:r>
-              <a:rPr sz="3600" b="0" lang="ru-RU">
+              <a:rPr sz="3400" b="0" lang="ru-RU">
                 <a:solidFill>
                   <a:srgbClr val="EDEBE6"/>
                 </a:solidFill>
@@ -5579,7 +5579,7 @@
         </p:nvSpPr>
         <p:spPr>
           <a:xfrm>
-            <a:off x="548640" y="438912"/>
+            <a:off x="548640" y="365760"/>
             <a:ext cx="7315200" cy="274320"/>
           </a:xfrm>
           <a:prstGeom prst="rect">
@@ -5618,7 +5618,7 @@
         </p:nvSpPr>
         <p:spPr>
           <a:xfrm>
-            <a:off x="9814255" y="438912"/>
+            <a:off x="9814255" y="365760"/>
             <a:ext cx="1828800" cy="274320"/>
           </a:xfrm>
           <a:prstGeom prst="rect">
@@ -5657,7 +5657,7 @@
         </p:nvSpPr>
         <p:spPr>
           <a:xfrm>
-            <a:off x="548640" y="749808"/>
+            <a:off x="548640" y="603504"/>
             <a:ext cx="11094415" cy="731520"/>
           </a:xfrm>
           <a:prstGeom prst="rect">
@@ -5675,7 +5675,7 @@
               </a:lnSpc>
             </a:pPr>
             <a:r>
-              <a:rPr sz="3600" b="0" lang="ru-RU">
+              <a:rPr sz="3400" b="0" lang="ru-RU">
                 <a:solidFill>
                   <a:srgbClr val="EDEBE6"/>
                 </a:solidFill>
@@ -5696,7 +5696,7 @@
         </p:nvSpPr>
         <p:spPr>
           <a:xfrm>
-            <a:off x="548640" y="1874519"/>
+            <a:off x="502920" y="1508760"/>
             <a:ext cx="64008" cy="274320"/>
           </a:xfrm>
           <a:prstGeom prst="rect">
@@ -5723,8 +5723,8 @@
         </p:nvSpPr>
         <p:spPr>
           <a:xfrm>
-            <a:off x="795528" y="1828800"/>
-            <a:ext cx="2953512" cy="979982"/>
+            <a:off x="749808" y="1463040"/>
+            <a:ext cx="2496312" cy="979982"/>
           </a:xfrm>
           <a:prstGeom prst="rect">
             <a:avLst/>
@@ -5783,7 +5783,7 @@
         </p:nvSpPr>
         <p:spPr>
           <a:xfrm>
-            <a:off x="548640" y="3156254"/>
+            <a:off x="502920" y="2735630"/>
             <a:ext cx="64008" cy="274320"/>
           </a:xfrm>
           <a:prstGeom prst="rect">
@@ -5810,8 +5810,8 @@
         </p:nvSpPr>
         <p:spPr>
           <a:xfrm>
-            <a:off x="795528" y="3110534"/>
-            <a:ext cx="2953512" cy="979982"/>
+            <a:off x="749808" y="2689910"/>
+            <a:ext cx="2496312" cy="979982"/>
           </a:xfrm>
           <a:prstGeom prst="rect">
             <a:avLst/>
@@ -5870,7 +5870,7 @@
         </p:nvSpPr>
         <p:spPr>
           <a:xfrm>
-            <a:off x="548640" y="4437989"/>
+            <a:off x="502920" y="3962501"/>
             <a:ext cx="64008" cy="274320"/>
           </a:xfrm>
           <a:prstGeom prst="rect">
@@ -5897,8 +5897,8 @@
         </p:nvSpPr>
         <p:spPr>
           <a:xfrm>
-            <a:off x="795528" y="4392269"/>
-            <a:ext cx="2953512" cy="979982"/>
+            <a:off x="749808" y="3916781"/>
+            <a:ext cx="2496312" cy="979982"/>
           </a:xfrm>
           <a:prstGeom prst="rect">
             <a:avLst/>
@@ -5951,7 +5951,7 @@
       </p:sp>
       <p:pic>
         <p:nvPicPr>
-          <p:cNvPr id="11" name="Picture 10" descr="tpu-monitoring.jpg"/>
+          <p:cNvPr id="11" name="Picture 10" descr="monitoring.jpg"/>
           <p:cNvPicPr>
             <a:picLocks noChangeAspect="1"/>
           </p:cNvPicPr>
@@ -5966,12 +5966,12 @@
         </p:blipFill>
         <p:spPr>
           <a:xfrm>
-            <a:off x="4389606" y="1783080"/>
-            <a:ext cx="7070082" cy="4690872"/>
+            <a:off x="3520439" y="1417320"/>
+            <a:ext cx="8396935" cy="5014093"/>
           </a:xfrm>
           <a:prstGeom prst="roundRect">
             <a:avLst>
-              <a:gd name="adj" fmla="val 1364"/>
+              <a:gd name="adj" fmla="val 1276"/>
             </a:avLst>
           </a:prstGeom>
           <a:ln w="12700">
@@ -6015,7 +6015,7 @@
         </p:nvSpPr>
         <p:spPr>
           <a:xfrm>
-            <a:off x="548640" y="438912"/>
+            <a:off x="548640" y="365760"/>
             <a:ext cx="7315200" cy="274320"/>
           </a:xfrm>
           <a:prstGeom prst="rect">
@@ -6054,7 +6054,7 @@
         </p:nvSpPr>
         <p:spPr>
           <a:xfrm>
-            <a:off x="9814255" y="438912"/>
+            <a:off x="9814255" y="365760"/>
             <a:ext cx="1828800" cy="274320"/>
           </a:xfrm>
           <a:prstGeom prst="rect">
@@ -6093,7 +6093,7 @@
         </p:nvSpPr>
         <p:spPr>
           <a:xfrm>
-            <a:off x="548640" y="749808"/>
+            <a:off x="548640" y="603504"/>
             <a:ext cx="11094415" cy="731520"/>
           </a:xfrm>
           <a:prstGeom prst="rect">
@@ -6111,7 +6111,7 @@
               </a:lnSpc>
             </a:pPr>
             <a:r>
-              <a:rPr sz="3600" b="0" lang="ru-RU">
+              <a:rPr sz="3400" b="0" lang="ru-RU">
                 <a:solidFill>
                   <a:srgbClr val="EDEBE6"/>
                 </a:solidFill>
@@ -6132,7 +6132,7 @@
         </p:nvSpPr>
         <p:spPr>
           <a:xfrm>
-            <a:off x="548640" y="1874519"/>
+            <a:off x="502920" y="1508760"/>
             <a:ext cx="64008" cy="274320"/>
           </a:xfrm>
           <a:prstGeom prst="rect">
@@ -6159,8 +6159,8 @@
         </p:nvSpPr>
         <p:spPr>
           <a:xfrm>
-            <a:off x="795528" y="1828800"/>
-            <a:ext cx="2953512" cy="979982"/>
+            <a:off x="749808" y="1463040"/>
+            <a:ext cx="2496312" cy="979982"/>
           </a:xfrm>
           <a:prstGeom prst="rect">
             <a:avLst/>
@@ -6206,7 +6206,7 @@
                 <a:ea typeface="Onest"/>
                 <a:cs typeface="Onest"/>
               </a:rPr>
-              <a:t>рамка и зона на снимке, клип ±5 с, статус в один клик</a:t>
+              <a:t>рамка и зона на снимке, клип, статус в один клик</a:t>
             </a:r>
           </a:p>
         </p:txBody>
@@ -6219,7 +6219,7 @@
         </p:nvSpPr>
         <p:spPr>
           <a:xfrm>
-            <a:off x="548640" y="3156254"/>
+            <a:off x="502920" y="2735630"/>
             <a:ext cx="64008" cy="274320"/>
           </a:xfrm>
           <a:prstGeom prst="rect">
@@ -6246,8 +6246,8 @@
         </p:nvSpPr>
         <p:spPr>
           <a:xfrm>
-            <a:off x="795528" y="3110534"/>
-            <a:ext cx="2953512" cy="1252677"/>
+            <a:off x="749808" y="2689910"/>
+            <a:ext cx="2496312" cy="1252677"/>
           </a:xfrm>
           <a:prstGeom prst="rect">
             <a:avLst/>
@@ -6293,7 +6293,7 @@
                 <a:ea typeface="Onest"/>
                 <a:cs typeface="Onest"/>
               </a:rPr>
-              <a:t>JSON-событие в RabbitMQ: долговечная очередь, без дублей</a:t>
+              <a:t>JSON-событие в очереди RabbitMQ, без дублей</a:t>
             </a:r>
           </a:p>
         </p:txBody>
@@ -6306,8 +6306,8 @@
         </p:nvSpPr>
         <p:spPr>
           <a:xfrm>
-            <a:off x="548640" y="4646676"/>
-            <a:ext cx="3017520" cy="402336"/>
+            <a:off x="502920" y="4189476"/>
+            <a:ext cx="2651760" cy="384048"/>
           </a:xfrm>
           <a:prstGeom prst="roundRect">
             <a:avLst>
@@ -6337,8 +6337,8 @@
         </p:nvSpPr>
         <p:spPr>
           <a:xfrm>
-            <a:off x="548640" y="4646676"/>
-            <a:ext cx="3017520" cy="402336"/>
+            <a:off x="502920" y="4189476"/>
+            <a:ext cx="2651760" cy="384048"/>
           </a:xfrm>
           <a:prstGeom prst="rect">
             <a:avLst/>
@@ -6376,8 +6376,8 @@
         </p:nvSpPr>
         <p:spPr>
           <a:xfrm>
-            <a:off x="1938528" y="5094732"/>
-            <a:ext cx="237744" cy="155448"/>
+            <a:off x="1709928" y="4619244"/>
+            <a:ext cx="237744" cy="128015"/>
           </a:xfrm>
           <a:prstGeom prst="downArrow">
             <a:avLst/>
@@ -6403,8 +6403,8 @@
         </p:nvSpPr>
         <p:spPr>
           <a:xfrm>
-            <a:off x="548640" y="5295900"/>
-            <a:ext cx="3017520" cy="402336"/>
+            <a:off x="502920" y="4792980"/>
+            <a:ext cx="2651760" cy="384048"/>
           </a:xfrm>
           <a:prstGeom prst="roundRect">
             <a:avLst>
@@ -6434,8 +6434,8 @@
         </p:nvSpPr>
         <p:spPr>
           <a:xfrm>
-            <a:off x="548640" y="5295900"/>
-            <a:ext cx="3017520" cy="402336"/>
+            <a:off x="502920" y="4792980"/>
+            <a:ext cx="2651760" cy="384048"/>
           </a:xfrm>
           <a:prstGeom prst="rect">
             <a:avLst/>
@@ -6473,8 +6473,8 @@
         </p:nvSpPr>
         <p:spPr>
           <a:xfrm>
-            <a:off x="1938528" y="5743956"/>
-            <a:ext cx="237744" cy="155448"/>
+            <a:off x="1709928" y="5222748"/>
+            <a:ext cx="237744" cy="128015"/>
           </a:xfrm>
           <a:prstGeom prst="downArrow">
             <a:avLst/>
@@ -6500,8 +6500,8 @@
         </p:nvSpPr>
         <p:spPr>
           <a:xfrm>
-            <a:off x="548640" y="5945124"/>
-            <a:ext cx="3017520" cy="402336"/>
+            <a:off x="502920" y="5396484"/>
+            <a:ext cx="2651760" cy="384048"/>
           </a:xfrm>
           <a:prstGeom prst="roundRect">
             <a:avLst>
@@ -6531,8 +6531,8 @@
         </p:nvSpPr>
         <p:spPr>
           <a:xfrm>
-            <a:off x="548640" y="5945124"/>
-            <a:ext cx="3017520" cy="402336"/>
+            <a:off x="502920" y="5396484"/>
+            <a:ext cx="2651760" cy="384048"/>
           </a:xfrm>
           <a:prstGeom prst="rect">
             <a:avLst/>
@@ -6562,9 +6562,48 @@
           </a:p>
         </p:txBody>
       </p:sp>
+      <p:sp>
+        <p:nvSpPr>
+          <p:cNvPr id="17" name="Сноска"/>
+          <p:cNvSpPr txBox="1"/>
+          <p:nvPr/>
+        </p:nvSpPr>
+        <p:spPr>
+          <a:xfrm>
+            <a:off x="502920" y="5962840"/>
+            <a:ext cx="2743200" cy="675703"/>
+          </a:xfrm>
+          <a:prstGeom prst="rect">
+            <a:avLst/>
+          </a:prstGeom>
+          <a:noFill/>
+        </p:spPr>
+        <p:txBody>
+          <a:bodyPr wrap="square" lIns="0" rIns="0" tIns="0" bIns="0" anchor="t"/>
+          <a:lstStyle/>
+          <a:p>
+            <a:pPr algn="l">
+              <a:lnSpc>
+                <a:spcPct val="110000"/>
+              </a:lnSpc>
+            </a:pPr>
+            <a:r>
+              <a:rPr sz="1250" b="0" lang="ru-RU">
+                <a:solidFill>
+                  <a:srgbClr val="77756F"/>
+                </a:solidFill>
+                <a:latin typeface="Onest"/>
+                <a:ea typeface="Onest"/>
+                <a:cs typeface="Onest"/>
+              </a:rPr>
+              <a:t>Подключение: exchange guard.edge.v1, JSON-конверт — docs/EDGE_PROTOCOL.md</a:t>
+            </a:r>
+          </a:p>
+        </p:txBody>
+      </p:sp>
       <p:pic>
         <p:nvPicPr>
-          <p:cNvPr id="17" name="Picture 16" descr="event.jpg"/>
+          <p:cNvPr id="18" name="Picture 17" descr="event.jpg"/>
           <p:cNvPicPr>
             <a:picLocks noChangeAspect="1"/>
           </p:cNvPicPr>
@@ -6572,19 +6611,19 @@
         </p:nvPicPr>
         <p:blipFill>
           <a:blip r:embed="rId2"/>
-          <a:srcRect l="10000" t="2500" r="10000" b="2500"/>
+          <a:srcRect l="10000" t="3000" r="10000" b="5500"/>
           <a:stretch>
             <a:fillRect/>
           </a:stretch>
         </p:blipFill>
         <p:spPr>
           <a:xfrm>
-            <a:off x="4413351" y="1783080"/>
-            <a:ext cx="7022592" cy="4690872"/>
+            <a:off x="3858663" y="1417320"/>
+            <a:ext cx="8058712" cy="5184648"/>
           </a:xfrm>
           <a:prstGeom prst="roundRect">
             <a:avLst>
-              <a:gd name="adj" fmla="val 1364"/>
+              <a:gd name="adj" fmla="val 1234"/>
             </a:avLst>
           </a:prstGeom>
           <a:ln w="12700">
@@ -6628,7 +6667,7 @@
         </p:nvSpPr>
         <p:spPr>
           <a:xfrm>
-            <a:off x="548640" y="438912"/>
+            <a:off x="548640" y="365760"/>
             <a:ext cx="7315200" cy="274320"/>
           </a:xfrm>
           <a:prstGeom prst="rect">
@@ -6667,7 +6706,7 @@
         </p:nvSpPr>
         <p:spPr>
           <a:xfrm>
-            <a:off x="9814255" y="438912"/>
+            <a:off x="9814255" y="365760"/>
             <a:ext cx="1828800" cy="274320"/>
           </a:xfrm>
           <a:prstGeom prst="rect">
@@ -6706,7 +6745,7 @@
         </p:nvSpPr>
         <p:spPr>
           <a:xfrm>
-            <a:off x="548640" y="749808"/>
+            <a:off x="548640" y="603504"/>
             <a:ext cx="11094415" cy="731520"/>
           </a:xfrm>
           <a:prstGeom prst="rect">
@@ -6724,7 +6763,7 @@
               </a:lnSpc>
             </a:pPr>
             <a:r>
-              <a:rPr sz="3600" b="0" lang="ru-RU">
+              <a:rPr sz="3400" b="0" lang="ru-RU">
                 <a:solidFill>
                   <a:srgbClr val="EDEBE6"/>
                 </a:solidFill>
@@ -6745,7 +6784,7 @@
         </p:nvSpPr>
         <p:spPr>
           <a:xfrm>
-            <a:off x="548640" y="1874519"/>
+            <a:off x="502920" y="1508760"/>
             <a:ext cx="64008" cy="274320"/>
           </a:xfrm>
           <a:prstGeom prst="rect">
@@ -6772,8 +6811,8 @@
         </p:nvSpPr>
         <p:spPr>
           <a:xfrm>
-            <a:off x="795528" y="1828800"/>
-            <a:ext cx="2953512" cy="979982"/>
+            <a:off x="749808" y="1463040"/>
+            <a:ext cx="2496312" cy="979982"/>
           </a:xfrm>
           <a:prstGeom prst="rect">
             <a:avLst/>
@@ -6832,7 +6871,7 @@
         </p:nvSpPr>
         <p:spPr>
           <a:xfrm>
-            <a:off x="548640" y="3156254"/>
+            <a:off x="502920" y="2735630"/>
             <a:ext cx="64008" cy="274320"/>
           </a:xfrm>
           <a:prstGeom prst="rect">
@@ -6859,8 +6898,8 @@
         </p:nvSpPr>
         <p:spPr>
           <a:xfrm>
-            <a:off x="795528" y="3110534"/>
-            <a:ext cx="2953512" cy="1252677"/>
+            <a:off x="749808" y="2689910"/>
+            <a:ext cx="2496312" cy="1252677"/>
           </a:xfrm>
           <a:prstGeom prst="rect">
             <a:avLst/>
@@ -6919,7 +6958,7 @@
         </p:nvSpPr>
         <p:spPr>
           <a:xfrm>
-            <a:off x="548640" y="4710684"/>
+            <a:off x="502920" y="4235196"/>
             <a:ext cx="64008" cy="274320"/>
           </a:xfrm>
           <a:prstGeom prst="rect">
@@ -6946,8 +6985,8 @@
         </p:nvSpPr>
         <p:spPr>
           <a:xfrm>
-            <a:off x="795528" y="4664964"/>
-            <a:ext cx="2953512" cy="979982"/>
+            <a:off x="749808" y="4189476"/>
+            <a:ext cx="2496312" cy="979982"/>
           </a:xfrm>
           <a:prstGeom prst="rect">
             <a:avLst/>
@@ -7015,12 +7054,12 @@
         </p:blipFill>
         <p:spPr>
           <a:xfrm>
-            <a:off x="4069079" y="1783080"/>
-            <a:ext cx="7711135" cy="4604579"/>
+            <a:off x="3520439" y="1417320"/>
+            <a:ext cx="8396935" cy="5014093"/>
           </a:xfrm>
           <a:prstGeom prst="roundRect">
             <a:avLst>
-              <a:gd name="adj" fmla="val 1390"/>
+              <a:gd name="adj" fmla="val 1276"/>
             </a:avLst>
           </a:prstGeom>
           <a:ln w="12700">
@@ -7064,7 +7103,7 @@
         </p:nvSpPr>
         <p:spPr>
           <a:xfrm>
-            <a:off x="548640" y="438912"/>
+            <a:off x="548640" y="365760"/>
             <a:ext cx="7315200" cy="274320"/>
           </a:xfrm>
           <a:prstGeom prst="rect">
@@ -7103,7 +7142,7 @@
         </p:nvSpPr>
         <p:spPr>
           <a:xfrm>
-            <a:off x="9814255" y="438912"/>
+            <a:off x="9814255" y="365760"/>
             <a:ext cx="1828800" cy="274320"/>
           </a:xfrm>
           <a:prstGeom prst="rect">
@@ -7142,7 +7181,7 @@
         </p:nvSpPr>
         <p:spPr>
           <a:xfrm>
-            <a:off x="548640" y="749808"/>
+            <a:off x="548640" y="603504"/>
             <a:ext cx="11094415" cy="731520"/>
           </a:xfrm>
           <a:prstGeom prst="rect">
@@ -7160,7 +7199,7 @@
               </a:lnSpc>
             </a:pPr>
             <a:r>
-              <a:rPr sz="3600" b="0" lang="ru-RU">
+              <a:rPr sz="3400" b="0" lang="ru-RU">
                 <a:solidFill>
                   <a:srgbClr val="EDEBE6"/>
                 </a:solidFill>
@@ -7181,7 +7220,7 @@
         </p:nvSpPr>
         <p:spPr>
           <a:xfrm>
-            <a:off x="548640" y="1874519"/>
+            <a:off x="502920" y="1508760"/>
             <a:ext cx="64008" cy="274320"/>
           </a:xfrm>
           <a:prstGeom prst="rect">
@@ -7208,8 +7247,8 @@
         </p:nvSpPr>
         <p:spPr>
           <a:xfrm>
-            <a:off x="795528" y="1828800"/>
-            <a:ext cx="2953512" cy="979982"/>
+            <a:off x="749808" y="1463040"/>
+            <a:ext cx="2496312" cy="979982"/>
           </a:xfrm>
           <a:prstGeom prst="rect">
             <a:avLst/>
@@ -7268,7 +7307,7 @@
         </p:nvSpPr>
         <p:spPr>
           <a:xfrm>
-            <a:off x="548640" y="3156254"/>
+            <a:off x="502920" y="2735630"/>
             <a:ext cx="64008" cy="274320"/>
           </a:xfrm>
           <a:prstGeom prst="rect">
@@ -7295,8 +7334,8 @@
         </p:nvSpPr>
         <p:spPr>
           <a:xfrm>
-            <a:off x="795528" y="3110534"/>
-            <a:ext cx="2953512" cy="1252677"/>
+            <a:off x="749808" y="2689910"/>
+            <a:ext cx="2496312" cy="1252677"/>
           </a:xfrm>
           <a:prstGeom prst="rect">
             <a:avLst/>
@@ -7355,7 +7394,7 @@
         </p:nvSpPr>
         <p:spPr>
           <a:xfrm>
-            <a:off x="548640" y="4710684"/>
+            <a:off x="502920" y="4235196"/>
             <a:ext cx="64008" cy="274320"/>
           </a:xfrm>
           <a:prstGeom prst="rect">
@@ -7382,8 +7421,8 @@
         </p:nvSpPr>
         <p:spPr>
           <a:xfrm>
-            <a:off x="795528" y="4664964"/>
-            <a:ext cx="2953512" cy="979982"/>
+            <a:off x="749808" y="4189476"/>
+            <a:ext cx="2496312" cy="1578051"/>
           </a:xfrm>
           <a:prstGeom prst="rect">
             <a:avLst/>
@@ -7444,19 +7483,19 @@
         </p:nvPicPr>
         <p:blipFill>
           <a:blip r:embed="rId2"/>
-          <a:srcRect l="26500" t="8500" r="1200" b="14000"/>
+          <a:srcRect l="26500" t="8500" r="1000" b="15000"/>
           <a:stretch>
             <a:fillRect/>
           </a:stretch>
         </p:blipFill>
         <p:spPr>
           <a:xfrm>
-            <a:off x="4069079" y="1783080"/>
-            <a:ext cx="7711135" cy="4649478"/>
+            <a:off x="3520439" y="1417320"/>
+            <a:ext cx="8396935" cy="4983870"/>
           </a:xfrm>
           <a:prstGeom prst="roundRect">
             <a:avLst>
-              <a:gd name="adj" fmla="val 1376"/>
+              <a:gd name="adj" fmla="val 1284"/>
             </a:avLst>
           </a:prstGeom>
           <a:ln w="12700">
@@ -7500,7 +7539,7 @@
         </p:nvSpPr>
         <p:spPr>
           <a:xfrm>
-            <a:off x="548640" y="438912"/>
+            <a:off x="548640" y="365760"/>
             <a:ext cx="7315200" cy="274320"/>
           </a:xfrm>
           <a:prstGeom prst="rect">
@@ -7539,7 +7578,7 @@
         </p:nvSpPr>
         <p:spPr>
           <a:xfrm>
-            <a:off x="9814255" y="438912"/>
+            <a:off x="9814255" y="365760"/>
             <a:ext cx="1828800" cy="274320"/>
           </a:xfrm>
           <a:prstGeom prst="rect">
@@ -7578,7 +7617,7 @@
         </p:nvSpPr>
         <p:spPr>
           <a:xfrm>
-            <a:off x="548640" y="749808"/>
+            <a:off x="548640" y="603504"/>
             <a:ext cx="11094415" cy="731520"/>
           </a:xfrm>
           <a:prstGeom prst="rect">
@@ -7596,7 +7635,7 @@
               </a:lnSpc>
             </a:pPr>
             <a:r>
-              <a:rPr sz="3600" b="0" lang="ru-RU">
+              <a:rPr sz="3400" b="0" lang="ru-RU">
                 <a:solidFill>
                   <a:srgbClr val="EDEBE6"/>
                 </a:solidFill>
@@ -7617,7 +7656,7 @@
         </p:nvSpPr>
         <p:spPr>
           <a:xfrm>
-            <a:off x="548640" y="1874519"/>
+            <a:off x="502920" y="1508760"/>
             <a:ext cx="64008" cy="274320"/>
           </a:xfrm>
           <a:prstGeom prst="rect">
@@ -7644,8 +7683,8 @@
         </p:nvSpPr>
         <p:spPr>
           <a:xfrm>
-            <a:off x="795528" y="1828800"/>
-            <a:ext cx="2953512" cy="979982"/>
+            <a:off x="749808" y="1463040"/>
+            <a:ext cx="2496312" cy="979982"/>
           </a:xfrm>
           <a:prstGeom prst="rect">
             <a:avLst/>
@@ -7704,7 +7743,7 @@
         </p:nvSpPr>
         <p:spPr>
           <a:xfrm>
-            <a:off x="548640" y="3156254"/>
+            <a:off x="502920" y="2735630"/>
             <a:ext cx="64008" cy="274320"/>
           </a:xfrm>
           <a:prstGeom prst="rect">
@@ -7731,8 +7770,8 @@
         </p:nvSpPr>
         <p:spPr>
           <a:xfrm>
-            <a:off x="795528" y="3110534"/>
-            <a:ext cx="2953512" cy="1305356"/>
+            <a:off x="749808" y="2689910"/>
+            <a:ext cx="2496312" cy="1305356"/>
           </a:xfrm>
           <a:prstGeom prst="rect">
             <a:avLst/>
@@ -7791,7 +7830,7 @@
         </p:nvSpPr>
         <p:spPr>
           <a:xfrm>
-            <a:off x="548640" y="4763363"/>
+            <a:off x="502920" y="4287875"/>
             <a:ext cx="64008" cy="274320"/>
           </a:xfrm>
           <a:prstGeom prst="rect">
@@ -7818,8 +7857,8 @@
         </p:nvSpPr>
         <p:spPr>
           <a:xfrm>
-            <a:off x="795528" y="4717643"/>
-            <a:ext cx="2953512" cy="1305356"/>
+            <a:off x="749808" y="4242155"/>
+            <a:ext cx="2496312" cy="1305356"/>
           </a:xfrm>
           <a:prstGeom prst="rect">
             <a:avLst/>
@@ -7887,12 +7926,12 @@
         </p:blipFill>
         <p:spPr>
           <a:xfrm>
-            <a:off x="4069079" y="1783080"/>
-            <a:ext cx="7711135" cy="4604579"/>
+            <a:off x="3520439" y="1417320"/>
+            <a:ext cx="8396935" cy="5014093"/>
           </a:xfrm>
           <a:prstGeom prst="roundRect">
             <a:avLst>
-              <a:gd name="adj" fmla="val 1390"/>
+              <a:gd name="adj" fmla="val 1276"/>
             </a:avLst>
           </a:prstGeom>
           <a:ln w="12700">
@@ -7936,7 +7975,7 @@
         </p:nvSpPr>
         <p:spPr>
           <a:xfrm>
-            <a:off x="548640" y="438912"/>
+            <a:off x="548640" y="365760"/>
             <a:ext cx="7315200" cy="274320"/>
           </a:xfrm>
           <a:prstGeom prst="rect">
@@ -7975,7 +8014,7 @@
         </p:nvSpPr>
         <p:spPr>
           <a:xfrm>
-            <a:off x="9814255" y="438912"/>
+            <a:off x="9814255" y="365760"/>
             <a:ext cx="1828800" cy="274320"/>
           </a:xfrm>
           <a:prstGeom prst="rect">
@@ -8014,7 +8053,7 @@
         </p:nvSpPr>
         <p:spPr>
           <a:xfrm>
-            <a:off x="548640" y="749808"/>
+            <a:off x="548640" y="603504"/>
             <a:ext cx="11094415" cy="731520"/>
           </a:xfrm>
           <a:prstGeom prst="rect">
@@ -8032,7 +8071,7 @@
               </a:lnSpc>
             </a:pPr>
             <a:r>
-              <a:rPr sz="3600" b="0" lang="ru-RU">
+              <a:rPr sz="3400" b="0" lang="ru-RU">
                 <a:solidFill>
                   <a:srgbClr val="EDEBE6"/>
                 </a:solidFill>
@@ -8053,7 +8092,7 @@
         </p:nvSpPr>
         <p:spPr>
           <a:xfrm>
-            <a:off x="548640" y="1874519"/>
+            <a:off x="502920" y="1508760"/>
             <a:ext cx="64008" cy="274320"/>
           </a:xfrm>
           <a:prstGeom prst="rect">
@@ -8080,8 +8119,8 @@
         </p:nvSpPr>
         <p:spPr>
           <a:xfrm>
-            <a:off x="795528" y="1828800"/>
-            <a:ext cx="2953512" cy="979982"/>
+            <a:off x="749808" y="1463040"/>
+            <a:ext cx="2496312" cy="1252677"/>
           </a:xfrm>
           <a:prstGeom prst="rect">
             <a:avLst/>
@@ -8140,7 +8179,7 @@
         </p:nvSpPr>
         <p:spPr>
           <a:xfrm>
-            <a:off x="548640" y="3156254"/>
+            <a:off x="502920" y="3008325"/>
             <a:ext cx="64008" cy="274320"/>
           </a:xfrm>
           <a:prstGeom prst="rect">
@@ -8167,8 +8206,8 @@
         </p:nvSpPr>
         <p:spPr>
           <a:xfrm>
-            <a:off x="795528" y="3110534"/>
-            <a:ext cx="2953512" cy="979982"/>
+            <a:off x="749808" y="2962605"/>
+            <a:ext cx="2496312" cy="1578051"/>
           </a:xfrm>
           <a:prstGeom prst="rect">
             <a:avLst/>
@@ -8227,7 +8266,7 @@
         </p:nvSpPr>
         <p:spPr>
           <a:xfrm>
-            <a:off x="548640" y="4437989"/>
+            <a:off x="502920" y="4833264"/>
             <a:ext cx="64008" cy="274320"/>
           </a:xfrm>
           <a:prstGeom prst="rect">
@@ -8254,8 +8293,8 @@
         </p:nvSpPr>
         <p:spPr>
           <a:xfrm>
-            <a:off x="795528" y="4392269"/>
-            <a:ext cx="2953512" cy="979982"/>
+            <a:off x="749808" y="4787544"/>
+            <a:ext cx="2496312" cy="1252677"/>
           </a:xfrm>
           <a:prstGeom prst="rect">
             <a:avLst/>
@@ -8323,12 +8362,12 @@
         </p:blipFill>
         <p:spPr>
           <a:xfrm>
-            <a:off x="4069079" y="1783080"/>
-            <a:ext cx="7711135" cy="4604579"/>
+            <a:off x="3520439" y="1417320"/>
+            <a:ext cx="8396935" cy="5014093"/>
           </a:xfrm>
           <a:prstGeom prst="roundRect">
             <a:avLst>
-              <a:gd name="adj" fmla="val 1390"/>
+              <a:gd name="adj" fmla="val 1276"/>
             </a:avLst>
           </a:prstGeom>
           <a:ln w="12700">
@@ -8372,7 +8411,7 @@
         </p:nvSpPr>
         <p:spPr>
           <a:xfrm>
-            <a:off x="548640" y="438912"/>
+            <a:off x="548640" y="365760"/>
             <a:ext cx="7315200" cy="274320"/>
           </a:xfrm>
           <a:prstGeom prst="rect">
@@ -8411,7 +8450,7 @@
         </p:nvSpPr>
         <p:spPr>
           <a:xfrm>
-            <a:off x="9814255" y="438912"/>
+            <a:off x="9814255" y="365760"/>
             <a:ext cx="1828800" cy="274320"/>
           </a:xfrm>
           <a:prstGeom prst="rect">
@@ -8450,7 +8489,7 @@
         </p:nvSpPr>
         <p:spPr>
           <a:xfrm>
-            <a:off x="548640" y="749808"/>
+            <a:off x="548640" y="603504"/>
             <a:ext cx="11094415" cy="731520"/>
           </a:xfrm>
           <a:prstGeom prst="rect">
@@ -8468,7 +8507,7 @@
               </a:lnSpc>
             </a:pPr>
             <a:r>
-              <a:rPr sz="3600" b="0" lang="ru-RU">
+              <a:rPr sz="3400" b="0" lang="ru-RU">
                 <a:solidFill>
                   <a:srgbClr val="EDEBE6"/>
                 </a:solidFill>
@@ -8489,8 +8528,8 @@
         </p:nvSpPr>
         <p:spPr>
           <a:xfrm>
-            <a:off x="548640" y="1719072"/>
-            <a:ext cx="3200400" cy="1042593"/>
+            <a:off x="502920" y="1353312"/>
+            <a:ext cx="2743200" cy="1270355"/>
           </a:xfrm>
           <a:prstGeom prst="rect">
             <a:avLst/>
@@ -8507,7 +8546,7 @@
               </a:lnSpc>
             </a:pPr>
             <a:r>
-              <a:rPr sz="4400" b="0" lang="ru-RU">
+              <a:rPr sz="4000" b="0" lang="ru-RU">
                 <a:solidFill>
                   <a:srgbClr val="F5C400"/>
                 </a:solidFill>
@@ -8536,7 +8575,7 @@
                 <a:ea typeface="Onest"/>
                 <a:cs typeface="Onest"/>
               </a:rPr>
-              <a:t>от нарушения до оповещения</a:t>
+              <a:t>до оповещения, медиана 2,2 с</a:t>
             </a:r>
           </a:p>
         </p:txBody>
@@ -8549,8 +8588,8 @@
         </p:nvSpPr>
         <p:spPr>
           <a:xfrm>
-            <a:off x="548640" y="3099993"/>
-            <a:ext cx="3200400" cy="1042593"/>
+            <a:off x="502920" y="2852267"/>
+            <a:ext cx="2743200" cy="1270355"/>
           </a:xfrm>
           <a:prstGeom prst="rect">
             <a:avLst/>
@@ -8567,7 +8606,7 @@
               </a:lnSpc>
             </a:pPr>
             <a:r>
-              <a:rPr sz="4400" b="0" lang="ru-RU">
+              <a:rPr sz="4000" b="0" lang="ru-RU">
                 <a:solidFill>
                   <a:srgbClr val="F5C400"/>
                 </a:solidFill>
@@ -8575,7 +8614,7 @@
                 <a:ea typeface="Onest ExtraBold"/>
                 <a:cs typeface="Onest ExtraBold"/>
               </a:rPr>
-              <a:t>4 × 4,9 к/с</a:t>
+              <a:t>4 × 4,9</a:t>
             </a:r>
           </a:p>
           <a:p>
@@ -8596,7 +8635,7 @@
                 <a:ea typeface="Onest"/>
                 <a:cs typeface="Onest"/>
               </a:rPr>
-              <a:t>четыре камеры на одном узле</a:t>
+              <a:t>кадра в секунду на каждой из 4 камер</a:t>
             </a:r>
           </a:p>
         </p:txBody>
@@ -8609,8 +8648,8 @@
         </p:nvSpPr>
         <p:spPr>
           <a:xfrm>
-            <a:off x="548640" y="4480915"/>
-            <a:ext cx="3200400" cy="1332331"/>
+            <a:off x="502920" y="4351223"/>
+            <a:ext cx="2743200" cy="1270355"/>
           </a:xfrm>
           <a:prstGeom prst="rect">
             <a:avLst/>
@@ -8627,7 +8666,7 @@
               </a:lnSpc>
             </a:pPr>
             <a:r>
-              <a:rPr sz="4400" b="0" lang="ru-RU">
+              <a:rPr sz="4000" b="0" lang="ru-RU">
                 <a:solidFill>
                   <a:srgbClr val="F5C400"/>
                 </a:solidFill>
@@ -8656,14 +8695,53 @@
                 <a:ea typeface="Onest"/>
                 <a:cs typeface="Onest"/>
               </a:rPr>
-              <a:t>больше кадров, чем на CPU того же узла</a:t>
+              <a:t>больше кадров, чем на CPU того же контейнера</a:t>
+            </a:r>
+          </a:p>
+        </p:txBody>
+      </p:sp>
+      <p:sp>
+        <p:nvSpPr>
+          <p:cNvPr id="8" name="Сноска"/>
+          <p:cNvSpPr txBox="1"/>
+          <p:nvPr/>
+        </p:nvSpPr>
+        <p:spPr>
+          <a:xfrm>
+            <a:off x="502920" y="6175882"/>
+            <a:ext cx="2743200" cy="462661"/>
+          </a:xfrm>
+          <a:prstGeom prst="rect">
+            <a:avLst/>
+          </a:prstGeom>
+          <a:noFill/>
+        </p:spPr>
+        <p:txBody>
+          <a:bodyPr wrap="square" lIns="0" rIns="0" tIns="0" bIns="0" anchor="t"/>
+          <a:lstStyle/>
+          <a:p>
+            <a:pPr algn="l">
+              <a:lnSpc>
+                <a:spcPct val="110000"/>
+              </a:lnSpc>
+            </a:pPr>
+            <a:r>
+              <a:rPr sz="1250" b="0" lang="ru-RU">
+                <a:solidFill>
+                  <a:srgbClr val="77756F"/>
+                </a:solidFill>
+                <a:latin typeface="Onest"/>
+                <a:ea typeface="Onest"/>
+                <a:cs typeface="Onest"/>
+              </a:rPr>
+              <a:t>Замеры 24.10 на стенде LinQ: docs/EDGE.md §6.1, §6.3</a:t>
             </a:r>
           </a:p>
         </p:txBody>
       </p:sp>
       <p:pic>
         <p:nvPicPr>
-          <p:cNvPr id="8" name="Picture 7" descr="tpu-monitoring.jpg"/>
+          <p:cNvPr id="9" name="Picture 8" descr="performance.jpg"/>
           <p:cNvPicPr>
             <a:picLocks noChangeAspect="1"/>
           </p:cNvPicPr>
@@ -8671,19 +8749,19 @@
         </p:nvPicPr>
         <p:blipFill>
           <a:blip r:embed="rId2"/>
-          <a:srcRect l="5800" r="27000" b="20000"/>
+          <a:srcRect l="5800"/>
           <a:stretch>
             <a:fillRect/>
           </a:stretch>
         </p:blipFill>
         <p:spPr>
           <a:xfrm>
-            <a:off x="4772381" y="1783080"/>
-            <a:ext cx="6304531" cy="4690872"/>
+            <a:off x="3520439" y="1417320"/>
+            <a:ext cx="8396935" cy="5014093"/>
           </a:xfrm>
           <a:prstGeom prst="roundRect">
             <a:avLst>
-              <a:gd name="adj" fmla="val 1364"/>
+              <a:gd name="adj" fmla="val 1276"/>
             </a:avLst>
           </a:prstGeom>
           <a:ln w="12700">
